--- a/public/materialy/1L/6/Prezentace k hodinám/5. Vektorová značka v Inkscapu.pptx
+++ b/public/materialy/1L/6/Prezentace k hodinám/5. Vektorová značka v Inkscapu.pptx
@@ -508,17 +508,61 @@
           <a:lstStyle/>
           <a:p>
             <a:r>
-              <a:t>Cíl hodiny: Student vytvoří jednoduchou vektorovou značku ze základních tvarů, ověří její čitelnost v malé velikosti a vyexportuje ji.</a:t>
-            </a:r>
-          </a:p>
-          <a:p>
-            <a:r>
-              <a:t>Soubory: Inkscape, Vektor v Inkscapu.txt</a:t>
-            </a:r>
-          </a:p>
-          <a:p>
-            <a:r>
-              <a:t>Výstup: Soubor znacka.svg, dva exporty PNG, HEX kódy barev a zápis o zjednodušení.</a:t>
+              <a:t>NEŽ ZAZVONÍ</a:t>
+            </a:r>
+          </a:p>
+          <a:p>
+            <a:r>
+              <a:t>Ověř, že Inkscape jde spustit. První start bývá pomalý, stejně jako u GIMPu.</a:t>
+            </a:r>
+          </a:p>
+          <a:p>
+            <a:r>
+              <a:t>Rozdej Vektor v Inkscapu.txt. Žádné ukázkové soubory tahle hodina nepotřebuje, značku si student vytvoří od nuly.</a:t>
+            </a:r>
+          </a:p>
+          <a:p/>
+          <a:p>
+            <a:r>
+              <a:t>KDYŽ INKSCAPE NENÍ</a:t>
+            </a:r>
+          </a:p>
+          <a:p>
+            <a:r>
+              <a:t>Metodika počítá s řízenou demonstrací na projektoru; studenti navrhnou značku na papír do čtverce a zapisují rozhodnutí. Test čitelnosti pak udělej tak, že návrh nakreslí ještě jednou do čtverce zhruba centimetr na centimetr.</a:t>
+            </a:r>
+          </a:p>
+          <a:p/>
+          <a:p>
+            <a:r>
+              <a:t>CÍL HODINY</a:t>
+            </a:r>
+          </a:p>
+          <a:p>
+            <a:r>
+              <a:t>Student vytvoří jednoduchou vektorovou značku ze základních tvarů, ověří její čitelnost v malé velikosti a vyexportuje ji.</a:t>
+            </a:r>
+          </a:p>
+          <a:p/>
+          <a:p>
+            <a:r>
+              <a:t>VÝSTUP, KTERÝ VYBÍRÁŠ</a:t>
+            </a:r>
+          </a:p>
+          <a:p>
+            <a:r>
+              <a:t>Soubor znacka.svg, dva exporty PNG, HEX kódy barev a zápis o zjednodušení.</a:t>
+            </a:r>
+          </a:p>
+          <a:p/>
+          <a:p>
+            <a:r>
+              <a:t>ROZVRŽENÍ</a:t>
+            </a:r>
+          </a:p>
+          <a:p>
+            <a:r>
+              <a:t>5 min tři znaky · 7 min výklad · 28 min tvorba · 5 min rozbor a exit ticket.</a:t>
             </a:r>
           </a:p>
         </p:txBody>
@@ -591,14 +635,47 @@
               <a:t>Čas: 0–5 minut.</a:t>
             </a:r>
           </a:p>
-          <a:p>
-            <a:r>
-              <a:t>Otázka pro studenty: Podle čeho poznáš, že je značka dobře navržená?</a:t>
-            </a:r>
-          </a:p>
-          <a:p>
-            <a:r>
-              <a:t>Postup: nech studenty rozhodnout a zapsat důvod dřív, než ukážeš řešení. Neprozrazuj správnou odpověď.</a:t>
+          <a:p/>
+          <a:p>
+            <a:r>
+              <a:t>CO ŘEKNEŠ</a:t>
+            </a:r>
+          </a:p>
+          <a:p>
+            <a:r>
+              <a:t>„Napište tři znaky, podle kterých se pozná dobře navržená značka. Ne co se vám líbí — co musí splňovat.“</a:t>
+            </a:r>
+          </a:p>
+          <a:p>
+            <a:r>
+              <a:t>Po dvou minutách: „Ve dvojici. Shodli jste se aspoň na jednom?“</a:t>
+            </a:r>
+          </a:p>
+          <a:p/>
+          <a:p>
+            <a:r>
+              <a:t>CO DĚLÁŠ</a:t>
+            </a:r>
+          </a:p>
+          <a:p>
+            <a:r>
+              <a:t>Vyber čtyři znaky, které zazní, a napiš je na tabuli. Na konci hodiny se k nim vrátíte a doplníte, co ve výčtu chybělo.</a:t>
+            </a:r>
+          </a:p>
+          <a:p>
+            <a:r>
+              <a:t>Skoro nikdy nezazní „musí fungovat v malé velikosti“. Právě to je test, který přijde ve druhé polovině hodiny.</a:t>
+            </a:r>
+          </a:p>
+          <a:p/>
+          <a:p>
+            <a:r>
+              <a:t>POZOR</a:t>
+            </a:r>
+          </a:p>
+          <a:p>
+            <a:r>
+              <a:t>Neopravuj estetické odpovědi typu „musí být hezká“. Nech je na tabuli. Až se značky zmenší na 16 px, opraví se to samo.</a:t>
             </a:r>
           </a:p>
         </p:txBody>
@@ -668,22 +745,55 @@
           <a:lstStyle/>
           <a:p>
             <a:r>
-              <a:t>Čas: 5–12 minut.</a:t>
-            </a:r>
-          </a:p>
-          <a:p>
-            <a:r>
-              <a:t>Klíčové pojmy: Objekty a cesty · Text na cesty · Čitelnost</a:t>
-            </a:r>
-          </a:p>
-          <a:p>
-            <a:r>
-              <a:t>Jednoduchost není ochuzení. Je to podmínka funkčnosti.</a:t>
-            </a:r>
-          </a:p>
-          <a:p>
-            <a:r>
-              <a:t>Postup: vysvětli stručně, ověř porozuměním otázkou, nepřednášej déle než 7 minut.</a:t>
+              <a:t>Čas: 5–12 minut. Ukazuj přitom přímo v Inkscapu na projektoru.</a:t>
+            </a:r>
+          </a:p>
+          <a:p/>
+          <a:p>
+            <a:r>
+              <a:t>CO ŘEKNEŠ</a:t>
+            </a:r>
+          </a:p>
+          <a:p>
+            <a:r>
+              <a:t>K bodu 01: „Ve vektoru není nic než tvary. Každý má obrys a výplň a dá se sáhnout na jednotlivé body cesty. Nekreslíte pixely, skládáte objekty.“</a:t>
+            </a:r>
+          </a:p>
+          <a:p>
+            <a:r>
+              <a:t>K bodu 02: „Text je zvláštní případ. Dokud je to text, potřebuje počítač, který ho otevře, mít nainstalované to písmo. Když ho převedete na cesty, stane se z něj obyčejný tvar a zobrazí se všude stejně. Cena je, že se pak už nedá přepsat.“</a:t>
+            </a:r>
+          </a:p>
+          <a:p>
+            <a:r>
+              <a:t>K bodu 03: „A teď zásadní věc. Značka musí být poznatelná v šestnácti pixelech. To je velikost ikony v záložce prohlížeče. Detail, který v téhle velikosti zmizí, tam nepatří — jen zdržuje.“</a:t>
+            </a:r>
+          </a:p>
+          <a:p>
+            <a:r>
+              <a:t>Závěr: „Jednoduchost není ochuzení. Je to podmínka, aby značka fungovala.“</a:t>
+            </a:r>
+          </a:p>
+          <a:p/>
+          <a:p>
+            <a:r>
+              <a:t>CO DĚLÁŠ</a:t>
+            </a:r>
+          </a:p>
+          <a:p>
+            <a:r>
+              <a:t>Ukaž jen tři věci: základní tvary, nástroj na úpravu cest a nabídku Cesta → Objekt na cestu. Víc nástrojů nepotřebují.</a:t>
+            </a:r>
+          </a:p>
+          <a:p/>
+          <a:p>
+            <a:r>
+              <a:t>POZOR</a:t>
+            </a:r>
+          </a:p>
+          <a:p>
+            <a:r>
+              <a:t>Neuč Inkscape jako program a nezdržuj se u pokročilých nástrojů. Hodina je o rozhodování, co ve značce nechat.</a:t>
             </a:r>
           </a:p>
         </p:txBody>
@@ -756,29 +866,85 @@
               <a:t>Čas: 12–40 minut.</a:t>
             </a:r>
           </a:p>
-          <a:p>
-            <a:r>
-              <a:t>Soubory: Inkscape, Vektor v Inkscapu.txt</a:t>
-            </a:r>
-          </a:p>
-          <a:p>
-            <a:r>
-              <a:t>12–24 min – tvorba značky; braň přidávání detailů.</a:t>
-            </a:r>
-          </a:p>
-          <a:p>
-            <a:r>
-              <a:t>24–32 min – test čitelnosti v 16 px, iterace.</a:t>
-            </a:r>
-          </a:p>
-          <a:p>
-            <a:r>
-              <a:t>32–40 min – export a porovnání velikostí svg a png.</a:t>
-            </a:r>
-          </a:p>
-          <a:p>
-            <a:r>
-              <a:t>Výstup: Soubor znacka.svg, dva exporty PNG, HEX kódy barev a zápis o zjednodušení.</a:t>
+          <a:p/>
+          <a:p>
+            <a:r>
+              <a:t>CO ŘEKNEŠ</a:t>
+            </a:r>
+          </a:p>
+          <a:p>
+            <a:r>
+              <a:t>„Plátno osm set krát osm set. Jen základní tvary, nejvýš tři barvy. Do čtyřiadvaceti minut chci mít první verzi — pak přijde test, který ji rozbije.“</a:t>
+            </a:r>
+          </a:p>
+          <a:p/>
+          <a:p>
+            <a:r>
+              <a:t>12–24 MIN · TVORBA ZNAČKY</a:t>
+            </a:r>
+          </a:p>
+          <a:p>
+            <a:r>
+              <a:t>Braň přidávání detailů. Nejčastější dotaz je „můžu tam dát ještě…“ a nejlepší odpověď je „a přežije to zmenšení?“.</a:t>
+            </a:r>
+          </a:p>
+          <a:p>
+            <a:r>
+              <a:t>Hlídej počet barev. Tři jsou strop a HEX kódy si musí zapsat průběžně, potom si je nikdo nedohledá.</a:t>
+            </a:r>
+          </a:p>
+          <a:p/>
+          <a:p>
+            <a:r>
+              <a:t>24–32 MIN · TEST 16 PX</a:t>
+            </a:r>
+          </a:p>
+          <a:p>
+            <a:r>
+              <a:t>Tohle je vrchol hodiny. Nech je zmenšit náhled na 16 px a dívat se ze vzdálenosti, ze které normálně koukají na monitor.</a:t>
+            </a:r>
+          </a:p>
+          <a:p>
+            <a:r>
+              <a:t>Většina značek testem neprojde a to je správně. Zadání zní: zjednoduš a zapiš, co jsi odebral a proč to šlo pryč.</a:t>
+            </a:r>
+          </a:p>
+          <a:p>
+            <a:r>
+              <a:t>Kdo projde napoprvé, dostane přísnější zadání: ať značku pozná spolužák ze sousední lavice bez nápovědy.</a:t>
+            </a:r>
+          </a:p>
+          <a:p/>
+          <a:p>
+            <a:r>
+              <a:t>32–40 MIN · EXPORT</a:t>
+            </a:r>
+          </a:p>
+          <a:p>
+            <a:r>
+              <a:t>znacka.svg, znacka_512.png a znacka_16.png. Ať porovnají velikosti — SVG jednoduché značky mívá pod kilobajt, PNG v 512 px řádově desítky kilobajtů.</a:t>
+            </a:r>
+          </a:p>
+          <a:p/>
+          <a:p>
+            <a:r>
+              <a:t>VÝSTUP</a:t>
+            </a:r>
+          </a:p>
+          <a:p>
+            <a:r>
+              <a:t>Soubor znacka.svg, dva exporty PNG, HEX kódy barev a zápis o zjednodušení.</a:t>
+            </a:r>
+          </a:p>
+          <a:p/>
+          <a:p>
+            <a:r>
+              <a:t>KDYŽ NENÍ ČAS</a:t>
+            </a:r>
+          </a:p>
+          <a:p>
+            <a:r>
+              <a:t>Nekrať test v 16 px, ten je jádrem hodiny. Zkrať tvorbu první verze a export nech na doma.</a:t>
             </a:r>
           </a:p>
         </p:txBody>
@@ -848,27 +1014,40 @@
           <a:lstStyle/>
           <a:p>
             <a:r>
-              <a:t>Průběžná kontrola. Projdi body nahlas, studenti si odškrtávají v sešitu.</a:t>
-            </a:r>
-          </a:p>
-          <a:p>
-            <a:r>
-              <a:t>• Značka je poznatelná i ve velikosti 16 px.</a:t>
-            </a:r>
-          </a:p>
-          <a:p>
-            <a:r>
-              <a:t>• Použil jsi nejvýše tři barvy a máš zapsané jejich HEX kódy.</a:t>
-            </a:r>
-          </a:p>
-          <a:p>
-            <a:r>
-              <a:t>• Text je převedený na cesty, nebo v značce žádný text není.</a:t>
-            </a:r>
-          </a:p>
-          <a:p>
-            <a:r>
-              <a:t>• Máš uložené svg i oba exporty png.</a:t>
+              <a:t>Průběžná kontrola, zhruba 38. minuta.</a:t>
+            </a:r>
+          </a:p>
+          <a:p/>
+          <a:p>
+            <a:r>
+              <a:t>CO ŘEKNEŠ</a:t>
+            </a:r>
+          </a:p>
+          <a:p>
+            <a:r>
+              <a:t>„Než odevzdáte, projedeme čtyři věci. Odškrtávejte si je.“ Čti body nahlas a mezi nimi nech pauzu.</a:t>
+            </a:r>
+          </a:p>
+          <a:p/>
+          <a:p>
+            <a:r>
+              <a:t>CO DĚLÁŠ</a:t>
+            </a:r>
+          </a:p>
+          <a:p>
+            <a:r>
+              <a:t>První bod ověř sám a rychle: postav se doprostřed třídy a nech je zvednout obrazovku s náhledem v 16 px. Co nepoznáš ty, nepozná ani nikdo jiný.</a:t>
+            </a:r>
+          </a:p>
+          <a:p/>
+          <a:p>
+            <a:r>
+              <a:t>POZOR</a:t>
+            </a:r>
+          </a:p>
+          <a:p>
+            <a:r>
+              <a:t>Není to známkování, je to poslední šance práci dodělat.</a:t>
             </a:r>
           </a:p>
         </p:txBody>
@@ -938,32 +1117,65 @@
           <a:lstStyle/>
           <a:p>
             <a:r>
-              <a:t>Společný rozbor – očekávané závěry:</a:t>
-            </a:r>
-          </a:p>
-          <a:p>
-            <a:r>
-              <a:t>Vektor je popis: SVG lze otevřít v textovém editoru; uvidíš souřadnice a barvy.</a:t>
-            </a:r>
-          </a:p>
-          <a:p>
-            <a:r>
-              <a:t>Text na cesty: Brání záměně písma na cizím počítači nebo v tiskárně.</a:t>
-            </a:r>
-          </a:p>
-          <a:p>
-            <a:r>
-              <a:t>Malá velikost rozhoduje: Co nefunguje v 16 px, nefunguje ani jako ikona.</a:t>
-            </a:r>
-          </a:p>
-          <a:p>
-            <a:r>
-              <a:t>Velikost souboru: Jednoduchá značka v SVG má často méně než kilobajt.</a:t>
-            </a:r>
-          </a:p>
-          <a:p>
-            <a:r>
-              <a:t>Hodnoť postup a zdůvodnění, ne shodu s jednou formulací.</a:t>
+              <a:t>Společný rozbor, 40–43 minut.</a:t>
+            </a:r>
+          </a:p>
+          <a:p/>
+          <a:p>
+            <a:r>
+              <a:t>CO ŘEKNEŠ</a:t>
+            </a:r>
+          </a:p>
+          <a:p>
+            <a:r>
+              <a:t>Udělej jednu věc, která tuhle hodinu spojí s hodinou 1: otevři něčí znacka.svg v obyčejném textovém editoru a promítni ho.</a:t>
+            </a:r>
+          </a:p>
+          <a:p>
+            <a:r>
+              <a:t>„Tohle je celý obrázek. Souřadnice a barvy, nic jiného. Proto se dá vykreslit v jakékoli velikosti a proto má pár set bajtů.“</a:t>
+            </a:r>
+          </a:p>
+          <a:p>
+            <a:r>
+              <a:t>Pak se vrať ke čtyřem znakům z tabule: „Který z nich byste teď přeformulovali?“</a:t>
+            </a:r>
+          </a:p>
+          <a:p/>
+          <a:p>
+            <a:r>
+              <a:t>OČEKÁVANÉ ZÁVĚRY</a:t>
+            </a:r>
+          </a:p>
+          <a:p>
+            <a:r>
+              <a:t>Vektor je popis: SVG lze otevřít v textovém editoru, uvidíš souřadnice a barvy.</a:t>
+            </a:r>
+          </a:p>
+          <a:p>
+            <a:r>
+              <a:t>Text na cesty: brání záměně písma na cizím počítači nebo v tiskárně.</a:t>
+            </a:r>
+          </a:p>
+          <a:p>
+            <a:r>
+              <a:t>Malá velikost rozhoduje: co nefunguje v 16 px, nefunguje ani jako ikona.</a:t>
+            </a:r>
+          </a:p>
+          <a:p>
+            <a:r>
+              <a:t>Velikost souboru: jednoduchá značka v SVG má často méně než kilobajt.</a:t>
+            </a:r>
+          </a:p>
+          <a:p/>
+          <a:p>
+            <a:r>
+              <a:t>POZOR</a:t>
+            </a:r>
+          </a:p>
+          <a:p>
+            <a:r>
+              <a:t>Hodnoť postup a zdůvodnění, ne estetiku. Nemá smysl známkovat výtvarný talent — známkuj to, že student umí říct, proč něco odebral.</a:t>
             </a:r>
           </a:p>
         </p:txBody>
@@ -1033,17 +1245,45 @@
           <a:lstStyle/>
           <a:p>
             <a:r>
-              <a:t>Exit ticket: Co jsi ze své značky odebral, aby byla čitelná v malé velikosti, a proč to šlo pryč?</a:t>
-            </a:r>
-          </a:p>
-          <a:p>
-            <a:r>
-              <a:t>Sbírej individuálně. Slouží jako doklad o učení každého studenta.</a:t>
-            </a:r>
-          </a:p>
-          <a:p>
-            <a:r>
-              <a:t>Očekávaná odpověď: Očekává se konkrétní odebraný detail a zdůvodnění, že nenesl rozpoznávací informaci.</a:t>
+              <a:t>Exit ticket, poslední dvě minuty.</a:t>
+            </a:r>
+          </a:p>
+          <a:p/>
+          <a:p>
+            <a:r>
+              <a:t>CO ŘEKNEŠ</a:t>
+            </a:r>
+          </a:p>
+          <a:p>
+            <a:r>
+              <a:t>„Každý sám. Co jsi ze své značky odebral, aby byla čitelná v malé velikosti, a proč to šlo pryč?“</a:t>
+            </a:r>
+          </a:p>
+          <a:p/>
+          <a:p>
+            <a:r>
+              <a:t>CO DĚLÁŠ</a:t>
+            </a:r>
+          </a:p>
+          <a:p>
+            <a:r>
+              <a:t>Sbírej u dveří. Zajímá tě druhá půlka odpovědi — to „proč to šlo pryč“.</a:t>
+            </a:r>
+          </a:p>
+          <a:p/>
+          <a:p>
+            <a:r>
+              <a:t>OČEKÁVANÁ ODPOVĚĎ</a:t>
+            </a:r>
+          </a:p>
+          <a:p>
+            <a:r>
+              <a:t>Konkrétní odebraný detail (stín, tenká linka, nápis, třetí barva) a zdůvodnění, že nenesl rozpoznávací informaci — značka se pozná i bez něj.</a:t>
+            </a:r>
+          </a:p>
+          <a:p>
+            <a:r>
+              <a:t>Odpověď „nic jsem neodebral, hned to bylo dobře“ přijmi jen tehdy, když značka testem v 16 px opravdu prošla. Jinak ji vrať.</a:t>
             </a:r>
           </a:p>
         </p:txBody>

--- a/public/materialy/1L/6/Prezentace k hodinám/5. Vektorová značka v Inkscapu.pptx
+++ b/public/materialy/1L/6/Prezentace k hodinám/5. Vektorová značka v Inkscapu.pptx
@@ -513,12 +513,12 @@
           </a:p>
           <a:p>
             <a:r>
-              <a:t>Ověř, že Inkscape jde spustit. První start bývá pomalý, stejně jako u GIMPu.</a:t>
-            </a:r>
-          </a:p>
-          <a:p>
-            <a:r>
-              <a:t>Rozdej Vektor v Inkscapu.txt. Žádné ukázkové soubory tahle hodina nepotřebuje, značku si student vytvoří od nuly.</a:t>
+              <a:t>Ověř, že Inkscape jde spustit. První start bývá pomalý, stejně jako u GIMPu.</a:t>
+            </a:r>
+          </a:p>
+          <a:p>
+            <a:r>
+              <a:t>Rozdej Vektor v Inkscapu.txt. Žádné ukázkové soubory tahle hodina nepotřebuje, značku si student vytvoří od nuly.</a:t>
             </a:r>
           </a:p>
           <a:p/>
@@ -529,7 +529,7 @@
           </a:p>
           <a:p>
             <a:r>
-              <a:t>Metodika počítá s řízenou demonstrací na projektoru; studenti navrhnou značku na papír do čtverce a zapisují rozhodnutí. Test čitelnosti pak udělej tak, že návrh nakreslí ještě jednou do čtverce zhruba centimetr na centimetr.</a:t>
+              <a:t>Metodika počítá s řízenou demonstrací na projektoru; studenti navrhnou značku na papír do čtverce a zapisují rozhodnutí. Test čitelnosti pak udělej tak, že návrh nakreslí ještě jednou do čtverce zhruba centimetr na centimetr.</a:t>
             </a:r>
           </a:p>
           <a:p/>
@@ -540,7 +540,7 @@
           </a:p>
           <a:p>
             <a:r>
-              <a:t>Student vytvoří jednoduchou vektorovou značku ze základních tvarů, ověří její čitelnost v malé velikosti a vyexportuje ji.</a:t>
+              <a:t>Student vytvoří jednoduchou vektorovou značku ze základních tvarů, ověří její čitelnost v malé velikosti a vyexportuje ji.</a:t>
             </a:r>
           </a:p>
           <a:p/>
@@ -551,7 +551,7 @@
           </a:p>
           <a:p>
             <a:r>
-              <a:t>Soubor znacka.svg, dva exporty PNG, HEX kódy barev a zápis o zjednodušení.</a:t>
+              <a:t>Soubor znacka.svg, dva exporty PNG, HEX kódy barev a zápis o zjednodušení.</a:t>
             </a:r>
           </a:p>
           <a:p/>
@@ -562,7 +562,7 @@
           </a:p>
           <a:p>
             <a:r>
-              <a:t>5 min tři znaky · 7 min výklad · 28 min tvorba · 5 min rozbor a exit ticket.</a:t>
+              <a:t>5 min tři znaky · 7 min výklad · 28 min tvorba · 5 min rozbor a exit ticket.</a:t>
             </a:r>
           </a:p>
         </p:txBody>
@@ -659,12 +659,12 @@
           </a:p>
           <a:p>
             <a:r>
-              <a:t>Vyber čtyři znaky, které zazní, a napiš je na tabuli. Na konci hodiny se k nim vrátíte a doplníte, co ve výčtu chybělo.</a:t>
-            </a:r>
-          </a:p>
-          <a:p>
-            <a:r>
-              <a:t>Skoro nikdy nezazní „musí fungovat v malé velikosti“. Právě to je test, který přijde ve druhé polovině hodiny.</a:t>
+              <a:t>Vyber čtyři znaky, které zazní, a napiš je na tabuli. Na konci hodiny se k nim vrátíte a doplníte, co ve výčtu chybělo.</a:t>
+            </a:r>
+          </a:p>
+          <a:p>
+            <a:r>
+              <a:t>Skoro nikdy nezazní „musí fungovat v malé velikosti“. Právě to je test, který přijde ve druhé polovině hodiny.</a:t>
             </a:r>
           </a:p>
           <a:p/>
@@ -745,7 +745,7 @@
           <a:lstStyle/>
           <a:p>
             <a:r>
-              <a:t>Čas: 5–12 minut. Ukazuj přitom přímo v Inkscapu na projektoru.</a:t>
+              <a:t>Čas: 5–12 minut. Ukazuj přitom přímo v Inkscapu na projektoru.</a:t>
             </a:r>
           </a:p>
           <a:p/>
@@ -756,17 +756,17 @@
           </a:p>
           <a:p>
             <a:r>
-              <a:t>K bodu 01: „Ve vektoru není nic než tvary. Každý má obrys a výplň a dá se sáhnout na jednotlivé body cesty. Nekreslíte pixely, skládáte objekty.“</a:t>
-            </a:r>
-          </a:p>
-          <a:p>
-            <a:r>
-              <a:t>K bodu 02: „Text je zvláštní případ. Dokud je to text, potřebuje počítač, který ho otevře, mít nainstalované to písmo. Když ho převedete na cesty, stane se z něj obyčejný tvar a zobrazí se všude stejně. Cena je, že se pak už nedá přepsat.“</a:t>
-            </a:r>
-          </a:p>
-          <a:p>
-            <a:r>
-              <a:t>K bodu 03: „A teď zásadní věc. Značka musí být poznatelná v šestnácti pixelech. To je velikost ikony v záložce prohlížeče. Detail, který v téhle velikosti zmizí, tam nepatří — jen zdržuje.“</a:t>
+              <a:t>K bodu 01: „Ve vektoru není nic než tvary. Každý má obrys a výplň a dá se sáhnout na jednotlivé body cesty. Nekreslíte pixely, skládáte objekty.“</a:t>
+            </a:r>
+          </a:p>
+          <a:p>
+            <a:r>
+              <a:t>K bodu 02: „Text je zvláštní případ. Dokud je to text, potřebuje počítač, který ho otevře, mít nainstalované to písmo. Když ho převedete na cesty, stane se z něj obyčejný tvar a zobrazí se všude stejně. Cena je, že se pak už nedá přepsat.“</a:t>
+            </a:r>
+          </a:p>
+          <a:p>
+            <a:r>
+              <a:t>K bodu 03: „A teď zásadní věc. Značka musí být poznatelná v šestnácti pixelech. To je velikost ikony v záložce prohlížeče. Detail, který v téhle velikosti zmizí, tam nepatří — jen zdržuje.“</a:t>
             </a:r>
           </a:p>
           <a:p>
@@ -782,7 +782,7 @@
           </a:p>
           <a:p>
             <a:r>
-              <a:t>Ukaž jen tři věci: základní tvary, nástroj na úpravu cest a nabídku Cesta → Objekt na cestu. Víc nástrojů nepotřebují.</a:t>
+              <a:t>Ukaž jen tři věci: základní tvary, nástroj na úpravu cest a nabídku Cesta → Objekt na cestu. Víc nástrojů nepotřebují.</a:t>
             </a:r>
           </a:p>
           <a:p/>
@@ -793,7 +793,7 @@
           </a:p>
           <a:p>
             <a:r>
-              <a:t>Neuč Inkscape jako program a nezdržuj se u pokročilých nástrojů. Hodina je o rozhodování, co ve značce nechat.</a:t>
+              <a:t>Neuč Inkscape jako program a nezdržuj se u pokročilých nástrojů. Hodina je o rozhodování, co ve značce nechat.</a:t>
             </a:r>
           </a:p>
         </p:txBody>
@@ -885,12 +885,12 @@
           </a:p>
           <a:p>
             <a:r>
-              <a:t>Braň přidávání detailů. Nejčastější dotaz je „můžu tam dát ještě…“ a nejlepší odpověď je „a přežije to zmenšení?“.</a:t>
-            </a:r>
-          </a:p>
-          <a:p>
-            <a:r>
-              <a:t>Hlídej počet barev. Tři jsou strop a HEX kódy si musí zapsat průběžně, potom si je nikdo nedohledá.</a:t>
+              <a:t>Braň přidávání detailů. Nejčastější dotaz je „můžu tam dát ještě…“ a nejlepší odpověď je „a přežije to zmenšení?“.</a:t>
+            </a:r>
+          </a:p>
+          <a:p>
+            <a:r>
+              <a:t>Hlídej počet barev. Tři jsou strop a HEX kódy si musí zapsat průběžně, potom si je nikdo nedohledá.</a:t>
             </a:r>
           </a:p>
           <a:p/>
@@ -901,12 +901,12 @@
           </a:p>
           <a:p>
             <a:r>
-              <a:t>Tohle je vrchol hodiny. Nech je zmenšit náhled na 16 px a dívat se ze vzdálenosti, ze které normálně koukají na monitor.</a:t>
-            </a:r>
-          </a:p>
-          <a:p>
-            <a:r>
-              <a:t>Většina značek testem neprojde a to je správně. Zadání zní: zjednoduš a zapiš, co jsi odebral a proč to šlo pryč.</a:t>
+              <a:t>Tohle je vrchol hodiny. Nech je zmenšit náhled na 16 px a dívat se ze vzdálenosti, ze které normálně koukají na monitor.</a:t>
+            </a:r>
+          </a:p>
+          <a:p>
+            <a:r>
+              <a:t>Většina značek testem neprojde a to je správně. Zadání zní: zjednoduš a zapiš, co jsi odebral a proč to šlo pryč.</a:t>
             </a:r>
           </a:p>
           <a:p>
@@ -922,7 +922,7 @@
           </a:p>
           <a:p>
             <a:r>
-              <a:t>znacka.svg, znacka_512.png a znacka_16.png. Ať porovnají velikosti — SVG jednoduché značky mívá pod kilobajt, PNG v 512 px řádově desítky kilobajtů.</a:t>
+              <a:t>znacka.svg, znacka_512.png a znacka_16.png. Ať porovnají velikosti — SVG jednoduché značky mívá pod kilobajt, PNG v 512 px řádově desítky kilobajtů.</a:t>
             </a:r>
           </a:p>
           <a:p/>
@@ -933,7 +933,7 @@
           </a:p>
           <a:p>
             <a:r>
-              <a:t>Soubor znacka.svg, dva exporty PNG, HEX kódy barev a zápis o zjednodušení.</a:t>
+              <a:t>Soubor znacka.svg, dva exporty PNG, HEX kódy barev a zápis o zjednodušení.</a:t>
             </a:r>
           </a:p>
           <a:p/>
@@ -944,7 +944,7 @@
           </a:p>
           <a:p>
             <a:r>
-              <a:t>Nekrať test v 16 px, ten je jádrem hodiny. Zkrať tvorbu první verze a export nech na doma.</a:t>
+              <a:t>Nekrať test v 16 px, ten je jádrem hodiny. Zkrať tvorbu první verze a export nech na doma.</a:t>
             </a:r>
           </a:p>
         </p:txBody>
@@ -1025,7 +1025,7 @@
           </a:p>
           <a:p>
             <a:r>
-              <a:t>„Než odevzdáte, projedeme čtyři věci. Odškrtávejte si je.“ Čti body nahlas a mezi nimi nech pauzu.</a:t>
+              <a:t>„Než odevzdáte, projedeme čtyři věci. Odškrtávejte si je.“ Čti body nahlas a mezi nimi nech pauzu.</a:t>
             </a:r>
           </a:p>
           <a:p/>
@@ -1036,7 +1036,7 @@
           </a:p>
           <a:p>
             <a:r>
-              <a:t>První bod ověř sám a rychle: postav se doprostřed třídy a nech je zvednout obrazovku s náhledem v 16 px. Co nepoznáš ty, nepozná ani nikdo jiný.</a:t>
+              <a:t>První bod ověř sám a rychle: postav se doprostřed třídy a nech je zvednout obrazovku s náhledem v 16 px. Co nepoznáš ty, nepozná ani nikdo jiný.</a:t>
             </a:r>
           </a:p>
           <a:p/>
@@ -1128,17 +1128,17 @@
           </a:p>
           <a:p>
             <a:r>
-              <a:t>Udělej jednu věc, která tuhle hodinu spojí s hodinou 1: otevři něčí znacka.svg v obyčejném textovém editoru a promítni ho.</a:t>
-            </a:r>
-          </a:p>
-          <a:p>
-            <a:r>
-              <a:t>„Tohle je celý obrázek. Souřadnice a barvy, nic jiného. Proto se dá vykreslit v jakékoli velikosti a proto má pár set bajtů.“</a:t>
-            </a:r>
-          </a:p>
-          <a:p>
-            <a:r>
-              <a:t>Pak se vrať ke čtyřem znakům z tabule: „Který z nich byste teď přeformulovali?“</a:t>
+              <a:t>Udělej jednu věc, která tuhle hodinu spojí s hodinou 1: otevři něčí znacka.svg v obyčejném textovém editoru a promítni ho.</a:t>
+            </a:r>
+          </a:p>
+          <a:p>
+            <a:r>
+              <a:t>„Tohle je celý obrázek. Souřadnice a barvy, nic jiného. Proto se dá vykreslit v jakékoli velikosti a proto má pár set bajtů.“</a:t>
+            </a:r>
+          </a:p>
+          <a:p>
+            <a:r>
+              <a:t>Pak se vrať ke čtyřem znakům z tabule: „Který z nich byste teď přeformulovali?“</a:t>
             </a:r>
           </a:p>
           <a:p/>
@@ -1149,22 +1149,22 @@
           </a:p>
           <a:p>
             <a:r>
-              <a:t>Vektor je popis: SVG lze otevřít v textovém editoru, uvidíš souřadnice a barvy.</a:t>
-            </a:r>
-          </a:p>
-          <a:p>
-            <a:r>
-              <a:t>Text na cesty: brání záměně písma na cizím počítači nebo v tiskárně.</a:t>
-            </a:r>
-          </a:p>
-          <a:p>
-            <a:r>
-              <a:t>Malá velikost rozhoduje: co nefunguje v 16 px, nefunguje ani jako ikona.</a:t>
-            </a:r>
-          </a:p>
-          <a:p>
-            <a:r>
-              <a:t>Velikost souboru: jednoduchá značka v SVG má často méně než kilobajt.</a:t>
+              <a:t>Vektor je popis: SVG lze otevřít v textovém editoru, uvidíš souřadnice a barvy.</a:t>
+            </a:r>
+          </a:p>
+          <a:p>
+            <a:r>
+              <a:t>Text na cesty: brání záměně písma na cizím počítači nebo v tiskárně.</a:t>
+            </a:r>
+          </a:p>
+          <a:p>
+            <a:r>
+              <a:t>Malá velikost rozhoduje: co nefunguje v 16 px, nefunguje ani jako ikona.</a:t>
+            </a:r>
+          </a:p>
+          <a:p>
+            <a:r>
+              <a:t>Velikost souboru: jednoduchá značka v SVG má často méně než kilobajt.</a:t>
             </a:r>
           </a:p>
           <a:p/>
@@ -1175,7 +1175,7 @@
           </a:p>
           <a:p>
             <a:r>
-              <a:t>Hodnoť postup a zdůvodnění, ne estetiku. Nemá smysl známkovat výtvarný talent — známkuj to, že student umí říct, proč něco odebral.</a:t>
+              <a:t>Hodnoť postup a zdůvodnění, ne estetiku. Nemá smysl známkovat výtvarný talent — známkuj to, že student umí říct, proč něco odebral.</a:t>
             </a:r>
           </a:p>
         </p:txBody>
@@ -1256,7 +1256,7 @@
           </a:p>
           <a:p>
             <a:r>
-              <a:t>„Každý sám. Co jsi ze své značky odebral, aby byla čitelná v malé velikosti, a proč to šlo pryč?“</a:t>
+              <a:t>„Každý sám. Co jsi ze své značky odebral, aby byla čitelná v malé velikosti, a proč to šlo pryč?“</a:t>
             </a:r>
           </a:p>
           <a:p/>
@@ -1267,7 +1267,7 @@
           </a:p>
           <a:p>
             <a:r>
-              <a:t>Sbírej u dveří. Zajímá tě druhá půlka odpovědi — to „proč to šlo pryč“.</a:t>
+              <a:t>Sbírej u dveří. Zajímá tě druhá půlka odpovědi — to „proč to šlo pryč“.</a:t>
             </a:r>
           </a:p>
           <a:p/>
@@ -1278,12 +1278,12 @@
           </a:p>
           <a:p>
             <a:r>
-              <a:t>Konkrétní odebraný detail (stín, tenká linka, nápis, třetí barva) a zdůvodnění, že nenesl rozpoznávací informaci — značka se pozná i bez něj.</a:t>
-            </a:r>
-          </a:p>
-          <a:p>
-            <a:r>
-              <a:t>Odpověď „nic jsem neodebral, hned to bylo dobře“ přijmi jen tehdy, když značka testem v 16 px opravdu prošla. Jinak ji vrať.</a:t>
+              <a:t>Konkrétní odebraný detail (stín, tenká linka, nápis, třetí barva) a zdůvodnění, že nenesl rozpoznávací informaci — značka se pozná i bez něj.</a:t>
+            </a:r>
+          </a:p>
+          <a:p>
+            <a:r>
+              <a:t>Odpověď „nic jsem neodebral, hned to bylo dobře“ přijmi jen tehdy, když značka testem v 16 px opravdu prošla. Jinak ji vrať.</a:t>
             </a:r>
           </a:p>
         </p:txBody>
@@ -4481,7 +4481,7 @@
                 </a:solidFill>
                 <a:latin typeface="Calibri"/>
               </a:rPr>
-              <a:t>Vektorová značka v Inkscapu</a:t>
+              <a:t>Vektorová značka v Inkscapu</a:t>
             </a:r>
           </a:p>
         </p:txBody>
@@ -4520,7 +4520,7 @@
                 </a:solidFill>
                 <a:latin typeface="Calibri"/>
               </a:rPr>
-              <a:t>Student vytvoří jednoduchou vektorovou značku ze základních tvarů, ověří její čitelnost v malé velikosti a vyexportuje ji.</a:t>
+              <a:t>Student vytvoří jednoduchou vektorovou značku ze základních tvarů, ověří její čitelnost v malé velikosti a vyexportuje ji.</a:t>
             </a:r>
           </a:p>
         </p:txBody>
@@ -4845,7 +4845,7 @@
                 </a:solidFill>
                 <a:latin typeface="Calibri"/>
               </a:rPr>
-              <a:t>POČÍTAČOVÁ GRAFIKA A PRÁCE S MULTIMÉDII</a:t>
+              <a:t>POČÍTAČOVÁ GRAFIKA A PRÁCE S MULTIMÉDII</a:t>
             </a:r>
           </a:p>
         </p:txBody>
@@ -5387,7 +5387,7 @@
                 </a:solidFill>
                 <a:latin typeface="Calibri"/>
               </a:rPr>
-              <a:t>POČÍTAČOVÁ GRAFIKA A PRÁCE S MULTIMÉDII</a:t>
+              <a:t>POČÍTAČOVÁ GRAFIKA A PRÁCE S MULTIMÉDII</a:t>
             </a:r>
           </a:p>
         </p:txBody>
@@ -5536,7 +5536,7 @@
                 </a:solidFill>
                 <a:latin typeface="Calibri"/>
               </a:rPr>
-              <a:t>Objekty a cesty</a:t>
+              <a:t>Objekty a cesty</a:t>
             </a:r>
           </a:p>
         </p:txBody>
@@ -5575,7 +5575,7 @@
                 </a:solidFill>
                 <a:latin typeface="Calibri"/>
               </a:rPr>
-              <a:t>Vše je tvar s obrysem a výplní. Cesty lze upravovat po jednotlivých bodech.</a:t>
+              <a:t>Vše je tvar s obrysem a výplní. Cesty lze upravovat po jednotlivých bodech.</a:t>
             </a:r>
           </a:p>
         </p:txBody>
@@ -5728,7 +5728,7 @@
                 </a:solidFill>
                 <a:latin typeface="Calibri"/>
               </a:rPr>
-              <a:t>Převod textu na tvary. Zajistí, že se písmo zobrazí i tam, kde není nainstalované.</a:t>
+              <a:t>Převod textu na tvary. Zajistí, že se písmo zobrazí i tam, kde není nainstalované.</a:t>
             </a:r>
           </a:p>
         </p:txBody>
@@ -5881,7 +5881,7 @@
                 </a:solidFill>
                 <a:latin typeface="Calibri"/>
               </a:rPr>
-              <a:t>Značka musí fungovat i v 16 px. Detail, který v malém zmizí, tam nepatří.</a:t>
+              <a:t>Značka musí fungovat i v 16 px. Detail, který v malém zmizí, tam nepatří.</a:t>
             </a:r>
           </a:p>
         </p:txBody>
@@ -6171,7 +6171,7 @@
                 </a:solidFill>
                 <a:latin typeface="Calibri"/>
               </a:rPr>
-              <a:t>POČÍTAČOVÁ GRAFIKA A PRÁCE S MULTIMÉDII</a:t>
+              <a:t>POČÍTAČOVÁ GRAFIKA A PRÁCE S MULTIMÉDII</a:t>
             </a:r>
           </a:p>
         </p:txBody>
@@ -6276,7 +6276,7 @@
                 </a:solidFill>
                 <a:latin typeface="Calibri"/>
               </a:rPr>
-              <a:t>Inkscape, Vektor v Inkscapu.txt</a:t>
+              <a:t>Inkscape, Vektor v Inkscapu.txt</a:t>
             </a:r>
           </a:p>
         </p:txBody>
@@ -6494,7 +6494,7 @@
                 </a:solidFill>
                 <a:latin typeface="Calibri"/>
               </a:rPr>
-              <a:t>Zmenši náhled. Pokud značku nepoznáš, zjednoduš ji a zapiš, co jsi odebral.</a:t>
+              <a:t>Zmenši náhled. Pokud značku nepoznáš, zjednoduš ji a zapiš, co jsi odebral.</a:t>
             </a:r>
           </a:p>
         </p:txBody>
@@ -6603,7 +6603,7 @@
                 </a:solidFill>
                 <a:latin typeface="Calibri"/>
               </a:rPr>
-              <a:t>Ulož znacka.svg a vyexportuj znacka_512.png a znacka_16.png.</a:t>
+              <a:t>Ulož znacka.svg a vyexportuj znacka_512.png a znacka_16.png.</a:t>
             </a:r>
           </a:p>
         </p:txBody>
@@ -6717,7 +6717,7 @@
                 </a:solidFill>
                 <a:latin typeface="Calibri"/>
               </a:rPr>
-              <a:t>Soubor znacka.svg, dva exporty PNG, HEX kódy barev a zápis o zjednodušení.</a:t>
+              <a:t>Soubor znacka.svg, dva exporty PNG, HEX kódy barev a zápis o zjednodušení.</a:t>
             </a:r>
           </a:p>
         </p:txBody>
@@ -6928,7 +6928,7 @@
                 </a:solidFill>
                 <a:latin typeface="Calibri"/>
               </a:rPr>
-              <a:t>POČÍTAČOVÁ GRAFIKA A PRÁCE S MULTIMÉDII</a:t>
+              <a:t>POČÍTAČOVÁ GRAFIKA A PRÁCE S MULTIMÉDII</a:t>
             </a:r>
           </a:p>
         </p:txBody>
@@ -7037,7 +7037,7 @@
                 </a:solidFill>
                 <a:latin typeface="Calibri"/>
               </a:rPr>
-              <a:t>Značka je poznatelná i ve velikosti 16 px.</a:t>
+              <a:t>Značka je poznatelná i ve velikosti 16 px.</a:t>
             </a:r>
           </a:p>
         </p:txBody>
@@ -7111,7 +7111,7 @@
                 </a:solidFill>
                 <a:latin typeface="Calibri"/>
               </a:rPr>
-              <a:t>Použil jsi nejvýše tři barvy a máš zapsané jejich HEX kódy.</a:t>
+              <a:t>Použil jsi nejvýše tři barvy a máš zapsané jejich HEX kódy.</a:t>
             </a:r>
           </a:p>
         </p:txBody>
@@ -7185,7 +7185,7 @@
                 </a:solidFill>
                 <a:latin typeface="Calibri"/>
               </a:rPr>
-              <a:t>Text je převedený na cesty, nebo v značce žádný text není.</a:t>
+              <a:t>Text je převedený na cesty, nebo v značce žádný text není.</a:t>
             </a:r>
           </a:p>
         </p:txBody>
@@ -7259,7 +7259,7 @@
                 </a:solidFill>
                 <a:latin typeface="Calibri"/>
               </a:rPr>
-              <a:t>Máš uložené svg i oba exporty png.</a:t>
+              <a:t>Máš uložené svg i oba exporty png.</a:t>
             </a:r>
           </a:p>
         </p:txBody>
@@ -7391,7 +7391,7 @@
                 </a:solidFill>
                 <a:latin typeface="Calibri"/>
               </a:rPr>
-              <a:t>Co si z hodiny odnést</a:t>
+              <a:t>Co si z hodiny odnést</a:t>
             </a:r>
           </a:p>
         </p:txBody>
@@ -7470,7 +7470,7 @@
                 </a:solidFill>
                 <a:latin typeface="Calibri"/>
               </a:rPr>
-              <a:t>POČÍTAČOVÁ GRAFIKA A PRÁCE S MULTIMÉDII</a:t>
+              <a:t>POČÍTAČOVÁ GRAFIKA A PRÁCE S MULTIMÉDII</a:t>
             </a:r>
           </a:p>
         </p:txBody>
@@ -7579,7 +7579,7 @@
                 </a:solidFill>
                 <a:latin typeface="Calibri"/>
               </a:rPr>
-              <a:t>SVG lze otevřít v textovém editoru; uvidíš souřadnice a barvy.</a:t>
+              <a:t>SVG lze otevřít v textovém editoru; uvidíš souřadnice a barvy.</a:t>
             </a:r>
           </a:p>
         </p:txBody>
@@ -7697,7 +7697,7 @@
                 </a:solidFill>
                 <a:latin typeface="Calibri"/>
               </a:rPr>
-              <a:t>Brání záměně písma na cizím počítači nebo v tiskárně.</a:t>
+              <a:t>Brání záměně písma na cizím počítači nebo v tiskárně.</a:t>
             </a:r>
           </a:p>
         </p:txBody>
@@ -7815,7 +7815,7 @@
                 </a:solidFill>
                 <a:latin typeface="Calibri"/>
               </a:rPr>
-              <a:t>Co nefunguje v 16 px, nefunguje ani jako ikona.</a:t>
+              <a:t>Co nefunguje v 16 px, nefunguje ani jako ikona.</a:t>
             </a:r>
           </a:p>
         </p:txBody>
@@ -7933,7 +7933,7 @@
                 </a:solidFill>
                 <a:latin typeface="Calibri"/>
               </a:rPr>
-              <a:t>Jednoduchá značka v SVG má často méně než kilobajt.</a:t>
+              <a:t>Jednoduchá značka v SVG má často méně než kilobajt.</a:t>
             </a:r>
           </a:p>
         </p:txBody>
@@ -8074,7 +8074,7 @@
                 </a:solidFill>
                 <a:latin typeface="Calibri"/>
               </a:rPr>
-              <a:t>POČÍTAČOVÁ GRAFIKA A PRÁCE S MULTIMÉDII</a:t>
+              <a:t>POČÍTAČOVÁ GRAFIKA A PRÁCE S MULTIMÉDII</a:t>
             </a:r>
           </a:p>
         </p:txBody>
@@ -8183,7 +8183,7 @@
                 </a:solidFill>
                 <a:latin typeface="Calibri"/>
               </a:rPr>
-              <a:t>Co jsi ze své značky odebral, aby byla čitelná v malé velikosti, a proč to šlo pryč?</a:t>
+              <a:t>Co jsi ze své značky odebral, aby byla čitelná v malé velikosti, a proč to šlo pryč?</a:t>
             </a:r>
           </a:p>
         </p:txBody>
@@ -8297,7 +8297,7 @@
                 </a:solidFill>
                 <a:latin typeface="Calibri"/>
               </a:rPr>
-              <a:t>Očekává se konkrétní odebraný detail a zdůvodnění, že nenesl rozpoznávací informaci.</a:t>
+              <a:t>Očekává se konkrétní odebraný detail a zdůvodnění, že nenesl rozpoznávací informaci.</a:t>
             </a:r>
           </a:p>
         </p:txBody>
